--- a/AI06-PromptEngineering.pptx
+++ b/AI06-PromptEngineering.pptx
@@ -169,12 +169,6 @@
           <p14:sldIdLst>
             <p14:sldId id="264"/>
           </p14:sldIdLst>
-        </p14:section>
-        <p14:section name="Module 5 : Amusons-nous avec l’IA – Expérimentations croisées" id="{23E05826-C0AC-438E-9E3F-28A6DBC3C18F}">
-          <p14:sldIdLst/>
-        </p14:section>
-        <p14:section name="Introduction – Décloisonner par le jeu" id="{710F597B-AC53-467D-8554-CBA89BAA9D70}">
-          <p14:sldIdLst/>
         </p14:section>
         <p14:section name="Le prompt" id="{E3514188-9CB8-4B9E-A257-B982EF5C14A4}">
           <p14:sldIdLst>
@@ -8024,7 +8018,7 @@
           <a:p>
             <a:fld id="{ECA158B7-8507-4363-B068-E4BAF1FF403D}" type="datetimeFigureOut">
               <a:rPr lang="fr-FR" smtClean="0"/>
-              <a:t>08/04/2026</a:t>
+              <a:t>09/04/2026</a:t>
             </a:fld>
             <a:endParaRPr lang="fr-FR"/>
           </a:p>
@@ -8464,7 +8458,7 @@
           <a:p>
             <a:fld id="{ECA158B7-8507-4363-B068-E4BAF1FF403D}" type="datetimeFigureOut">
               <a:rPr lang="fr-FR" smtClean="0"/>
-              <a:t>08/04/2026</a:t>
+              <a:t>09/04/2026</a:t>
             </a:fld>
             <a:endParaRPr lang="fr-FR"/>
           </a:p>
